--- a/dist/초1/과학/계절과자연/초1_과학_계절과자연_01_계절과날씨기록.pptx
+++ b/dist/초1/과학/계절과자연/초1_과학_계절과자연_01_계절과날씨기록.pptx
@@ -120,20 +120,20 @@
   <p:extLst>
     <p:ext uri="{521415D9-36F7-43E2-AB2F-B90AF26B5E84}">
       <p14:sectionLst xmlns:p14="http://schemas.microsoft.com/office/powerpoint/2010/main">
-        <p14:section name="도입" id="{e24acfb9-3c1d-28a4-6710-a6ff2828c695}">
+        <p14:section name="도입" id="{502a5cb0-d2d4-eb47-4046-4a7ec9cd9a1d}">
           <p14:sldIdLst>
             <p14:sldId id="256"/>
             <p14:sldId id="257"/>
           </p14:sldIdLst>
         </p14:section>
-        <p14:section name="개념" id="{fb994995-b156-588d-00ba-c477318493f7}">
+        <p14:section name="개념" id="{2ab788e7-c5db-5ec6-510f-ab5fb7fb755f}">
           <p14:sldIdLst>
             <p14:sldId id="258"/>
             <p14:sldId id="261"/>
             <p14:sldId id="265"/>
           </p14:sldIdLst>
         </p14:section>
-        <p14:section name="연습" id="{441bfaa8-9b95-504a-52c8-5efc1cdd1e0f}">
+        <p14:section name="연습" id="{bb3069c2-2909-ff84-cd1c-f61a3262e997}">
           <p14:sldIdLst>
             <p14:sldId id="259"/>
             <p14:sldId id="260"/>
@@ -142,27 +142,27 @@
             <p14:sldId id="264"/>
           </p14:sldIdLst>
         </p14:section>
-        <p14:section name="개념" id="{fdebbb20-d77b-e01f-2688-27e198697130}">
+        <p14:section name="개념" id="{2be58823-6676-4fee-886f-83c3d5f1dc59}">
           <p14:sldIdLst/>
         </p14:section>
-        <p14:section name="연습" id="{ca07b4b5-f821-67b5-9ca5-21cbb83659b4}">
+        <p14:section name="연습" id="{2fc025eb-bc3e-8154-d813-5afff7c18ac2}">
           <p14:sldIdLst/>
         </p14:section>
-        <p14:section name="개념" id="{6b5f7665-e94c-c90f-f501-4cb5deebe101}">
+        <p14:section name="개념" id="{cd560c0b-4c02-8eb5-608d-ebaecf4a2663}">
           <p14:sldIdLst/>
         </p14:section>
-        <p14:section name="확인" id="{61a932bb-cb69-cd45-6227-4aab44b8f504}">
+        <p14:section name="확인" id="{6c53082d-28ed-ff8c-a1f4-c49b25eddbbc}">
           <p14:sldIdLst>
             <p14:sldId id="266"/>
             <p14:sldId id="267"/>
           </p14:sldIdLst>
         </p14:section>
-        <p14:section name="정리" id="{fd224ca1-180b-0afb-3879-ea6b81985b92}">
+        <p14:section name="정리" id="{2b32b52d-c783-3a35-7ac2-ea0e9af22d69}">
           <p14:sldIdLst>
             <p14:sldId id="268"/>
           </p14:sldIdLst>
         </p14:section>
-        <p14:section name="보충" id="{57256764-553b-7896-55bc-b7a34e18dc3a}">
+        <p14:section name="보충" id="{afeb4cc2-4016-9147-fb3e-433cf475d816}">
           <p14:sldIdLst>
             <p14:sldId id="269"/>
           </p14:sldIdLst>
@@ -1085,7 +1085,7 @@
 막히면
 - 가족 사진(여름 물놀이, 겨울 눈사람)이나 달력 그림을 보며 계절마다 한 일을 이야기합니다.
 주의
-- 이 차시는 계획상 앞 차시가 없습니다. 계절 이름이 계속 어려우면 며칠 동안 산책할 때 “지금은 무슨 계절이지?”를 짧게 묻고 다시 S02부터 시작합니다.
+- 계절 이름이 계속 어려우면 며칠 동안 산책할 때 “지금은 무슨 계절이지?”를 짧게 묻고 다시 S02부터 시작합니다.
 - 보충이 오래 걸리면 오늘은 S05(창밖 날씨 보기)까지만 하고, 다음 날 S02부터 다시 시작합니다.</a:t>
             </a:r>
             <a:endParaRPr lang="en-US" dirty="0"/>
@@ -1175,7 +1175,7 @@
             <a:r>
               <a:rPr lang="en-US" dirty="0"/>
               <a:t>[S02 · 선수 확인(네 계절의 이름)]
-목적: 날씨를 기록하고 계절과 견주려면 네 계절의 이름을 알아야 합니다. 이 차시는 계획상 앞 차시가 없으므로, 유치원과 1학년 통합 교과에서 익힌 네 계절의 이름을 확인합니다.
+목적: 날씨를 기록하고 계절과 견주려면 네 계절의 이름을 알아야 합니다. 유치원과 1학년 통합 교과에서 익힌 네 계절의 이름을 확인합니다. 관찰하는 방법은 앞 차시 ‘오감으로 관찰하기’에서 익혔습니다.
 시간: 약 3분
 이렇게 말해 보세요
 - “① 일 년에는 계절이 네 개 있어. 이름을 말해 볼래?”
